--- a/apps/resources/bundled_files/5-klass-oyundar-aktivduuluktor-v6.pptx
+++ b/apps/resources/bundled_files/5-klass-oyundar-aktivduuluktor-v6.pptx
@@ -5051,7 +5051,7 @@
                 </a:solidFill>
                 <a:latin typeface="PT Sans"/>
               </a:rPr>
-              <a:t>5-класс › Оюндар</a:t>
+              <a:t>Оюндар</a:t>
             </a:r>
           </a:p>
           <a:p>
@@ -5145,7 +5145,7 @@
                 </a:solidFill>
                 <a:latin typeface="PT Sans"/>
               </a:rPr>
-              <a:t>5-класс · катыштар, бөлчөктөр жана КаДа – БөКө – КоКе</a:t>
+              <a:t>катыштар, бөлчөктөр жана КаДа – БөКө – КоКе</a:t>
             </a:r>
           </a:p>
         </p:txBody>
@@ -5833,7 +5833,7 @@
                 </a:solidFill>
                 <a:latin typeface="PT Sans"/>
               </a:rPr>
-              <a:t>5-класс › Оюндар</a:t>
+              <a:t>Оюндар</a:t>
             </a:r>
           </a:p>
           <a:p>
@@ -7223,7 +7223,7 @@
                 </a:solidFill>
                 <a:latin typeface="PT Sans"/>
               </a:rPr>
-              <a:t>5-класс › Оюндар</a:t>
+              <a:t>Оюндар</a:t>
             </a:r>
           </a:p>
           <a:p>
@@ -9060,7 +9060,7 @@
                 </a:solidFill>
                 <a:latin typeface="PT Sans"/>
               </a:rPr>
-              <a:t>5-класс › Оюндар</a:t>
+              <a:t>Оюндар</a:t>
             </a:r>
           </a:p>
           <a:p>
@@ -11448,7 +11448,7 @@
                 </a:solidFill>
                 <a:latin typeface="PT Sans"/>
               </a:rPr>
-              <a:t>5-класс › Оюндар</a:t>
+              <a:t>Оюндар</a:t>
             </a:r>
           </a:p>
           <a:p>
@@ -13090,7 +13090,7 @@
                 </a:solidFill>
                 <a:latin typeface="PT Sans"/>
               </a:rPr>
-              <a:t>5-класс › Оюндар</a:t>
+              <a:t>Оюндар</a:t>
             </a:r>
           </a:p>
           <a:p>
@@ -14417,7 +14417,7 @@
                 </a:solidFill>
                 <a:latin typeface="PT Sans"/>
               </a:rPr>
-              <a:t>5-класс › Оюндар</a:t>
+              <a:t>Оюндар</a:t>
             </a:r>
           </a:p>
           <a:p>
@@ -19049,7 +19049,7 @@
                 </a:solidFill>
                 <a:latin typeface="PT Sans"/>
               </a:rPr>
-              <a:t>5-класс › Оюндар</a:t>
+              <a:t>Оюндар</a:t>
             </a:r>
           </a:p>
           <a:p>
@@ -20829,7 +20829,7 @@
                 </a:solidFill>
                 <a:latin typeface="PT Sans"/>
               </a:rPr>
-              <a:t>5-класс › Оюндар</a:t>
+              <a:t>Оюндар</a:t>
             </a:r>
           </a:p>
           <a:p>
@@ -22222,7 +22222,7 @@
                 </a:solidFill>
                 <a:latin typeface="PT Sans"/>
               </a:rPr>
-              <a:t>5-класс › Оюндар</a:t>
+              <a:t>Оюндар</a:t>
             </a:r>
           </a:p>
           <a:p>
@@ -25078,7 +25078,7 @@
                 </a:solidFill>
                 <a:latin typeface="PT Sans"/>
               </a:rPr>
-              <a:t>5-класс › Оюндар</a:t>
+              <a:t>Оюндар</a:t>
             </a:r>
           </a:p>
           <a:p>
@@ -26552,7 +26552,7 @@
                 </a:solidFill>
                 <a:latin typeface="PT Sans"/>
               </a:rPr>
-              <a:t>5-класс › Оюндар</a:t>
+              <a:t>Оюндар</a:t>
             </a:r>
           </a:p>
           <a:p>
@@ -27615,7 +27615,7 @@
                 </a:solidFill>
                 <a:latin typeface="PT Sans"/>
               </a:rPr>
-              <a:t>5-класс › Оюндар</a:t>
+              <a:t>Оюндар</a:t>
             </a:r>
           </a:p>
           <a:p>
@@ -32178,7 +32178,7 @@
                 </a:solidFill>
                 <a:latin typeface="PT Sans"/>
               </a:rPr>
-              <a:t>5-класс › Оюндар</a:t>
+              <a:t>Оюндар</a:t>
             </a:r>
           </a:p>
           <a:p>
@@ -37028,7 +37028,7 @@
                 </a:solidFill>
                 <a:latin typeface="PT Sans"/>
               </a:rPr>
-              <a:t>5-класс › Оюндар</a:t>
+              <a:t>Оюндар</a:t>
             </a:r>
           </a:p>
           <a:p>
@@ -37843,7 +37843,7 @@
                 </a:solidFill>
                 <a:latin typeface="PT Sans"/>
               </a:rPr>
-              <a:t>5-класс › Оюндар</a:t>
+              <a:t>Оюндар</a:t>
             </a:r>
           </a:p>
           <a:p>
@@ -39208,7 +39208,7 @@
                 </a:solidFill>
                 <a:latin typeface="PT Sans"/>
               </a:rPr>
-              <a:t>5-класс › Оюндар</a:t>
+              <a:t>Оюндар</a:t>
             </a:r>
           </a:p>
           <a:p>
@@ -40605,7 +40605,7 @@
                 </a:solidFill>
                 <a:latin typeface="PT Sans"/>
               </a:rPr>
-              <a:t>5-класс › Оюндар</a:t>
+              <a:t>Оюндар</a:t>
             </a:r>
           </a:p>
           <a:p>
@@ -41711,7 +41711,7 @@
                 </a:solidFill>
                 <a:latin typeface="PT Sans"/>
               </a:rPr>
-              <a:t>5-класс › Оюндар</a:t>
+              <a:t>Оюндар</a:t>
             </a:r>
           </a:p>
           <a:p>

--- a/apps/resources/bundled_files/5-klass-oyundar-aktivduuluktor-v6.pptx
+++ b/apps/resources/bundled_files/5-klass-oyundar-aktivduuluktor-v6.pptx
@@ -870,7 +870,7 @@
           <a:lstStyle/>
           <a:p>
             <a:r>
-              <a:t>Окуучулар 9 жоопту өз каалоосу менен торго жазышат, ошондуктан ар бир картa ар башка болот.</a:t>
+              <a:t>Окуучулар 9 жоопту өз каалоосу менен торго жазышат, ошондуктан ар бир карта ар башка болот.</a:t>
             </a:r>
           </a:p>
         </p:txBody>
